--- a/assets/pptx/catalog-506.pptx
+++ b/assets/pptx/catalog-506.pptx
@@ -3241,7 +3241,7 @@
                 <a:ea typeface="Ebrima"/>
                 <a:cs typeface="Ebrima"/>
               </a:rPr>
-              <a:t>በየት ሃገር ነው እግዚአብሔር ሰው ጥሎ የሚያወቀው እግዚአብሔር (4x)</a:t>
+              <a:t>በየት ሃገር ነው እግዚአብሔር ሰው ጥሎ የሚያወቀው እግዚአብሔር 4x</a:t>
             </a:r>
           </a:p>
           <a:p>
@@ -3259,7 +3259,7 @@
                 <a:ea typeface="Ebrima"/>
                 <a:cs typeface="Ebrima"/>
               </a:rPr>
-              <a:t>እግዚአብሔር አይጥልሽም, እግዚአብሔር አይተውሽም, እግዚአብሔር አይረሳሽም, (2x), እግዚአብሔር አይጥልህም, እግዚአብሔር አይተውህም, እግዚአብሔር አይረሳህም, (2x)</a:t>
+              <a:t>እግዚአብሔር አይጥልሽም, እግዚአብሔር አይተውሽም, እግዚአብሔር አይረሳሽም, 2x, እግዚአብሔር አይጥልህም, እግዚአብሔር አይተውህም, እግዚአብሔር አይረሳህም, 2x</a:t>
             </a:r>
           </a:p>
           <a:p>
@@ -3277,7 +3277,7 @@
                 <a:ea typeface="Ebrima"/>
                 <a:cs typeface="Ebrima"/>
               </a:rPr>
-              <a:t>ዝም በሉ ዝም በሉ በኩራት አትናገሩ (3x) እግዚአብሔር አዋቂ ነው ስራውን ሚመዝን ነው (3x) የእኔ አምላክ አዋቂ ነው ስራውን ሚመዝን ነው (3x)</a:t>
+              <a:t>ዝም በሉ ዝም በሉ በኩራት አትናገሩ 3x እግዚአብሔር አዋቂ ነው ስራውን ሚመዝን ነው 3x የእኔ አምላክ አዋቂ ነው ስራውን ሚመዝን ነው 3x</a:t>
             </a:r>
           </a:p>
           <a:p>
@@ -3295,7 +3295,7 @@
                 <a:ea typeface="Ebrima"/>
                 <a:cs typeface="Ebrima"/>
               </a:rPr>
-              <a:t>እግዚአብሔር አይጥለንም, እግዚአብሔር አይተወንም, እግዚአብሔር አይረሳንም, (2x), እግዚአብሔር አይጥለንም, እግዚአብሔር አይተወንም, እግዚአብሔር አይረሳንም, (2x)</a:t>
+              <a:t>እግዚአብሔር አይጥለንም, እግዚአብሔር አይተወንም, እግዚአብሔር አይረሳንም, 2x, እግዚአብሔር አይጥለንም, እግዚአብሔር አይተወንም, እግዚአብሔር አይረሳንም, 2x</a:t>
             </a:r>
           </a:p>
           <a:p>
@@ -3313,7 +3313,7 @@
                 <a:ea typeface="Ebrima"/>
                 <a:cs typeface="Ebrima"/>
               </a:rPr>
-              <a:t>ሁሉም በየጓዳው ችግሩን እያየ አንተን ለማመስገን እንደምን ዘገየ (2x)</a:t>
+              <a:t>ሁሉም በየጓዳው ችግሩን እያየ አንተን ለማመስገን እንደምን ዘገየ 2x</a:t>
             </a:r>
           </a:p>
           <a:p>
@@ -3403,7 +3403,7 @@
                 <a:ea typeface="Ebrima"/>
                 <a:cs typeface="Ebrima"/>
               </a:rPr>
-              <a:t>(2x)</a:t>
+              <a:t>2x</a:t>
             </a:r>
           </a:p>
           <a:p>
@@ -3421,7 +3421,7 @@
                 <a:ea typeface="Ebrima"/>
                 <a:cs typeface="Ebrima"/>
               </a:rPr>
-              <a:t>ዝም በሉ ዝም በሉ በኩራት አትናገሩ (3x) እግዚአብሔር አዋቂ ነው ስራውን ሚመዝን ነው (3x) የእኔ አምላክ አዋቂ ነው ሥራውን ሚመዝን ነው (3x) ሥራውን ሚመዝን ነው (6x)</a:t>
+              <a:t>ዝም በሉ ዝም በሉ በኩራት አትናገሩ 3x እግዚአብሔር አዋቂ ነው ስራውን ሚመዝን ነው 3x የእኔ አምላክ አዋቂ ነው ሥራውን ሚመዝን ነው 3x ሥራውን ሚመዝን ነው 6x</a:t>
             </a:r>
           </a:p>
         </p:txBody>
